--- a/eval/samples/q3/slides.pptx
+++ b/eval/samples/q3/slides.pptx
@@ -591,7 +591,7 @@
           <a:lstStyle/>
           <a:p>
             <a:r>
-              <a:t>Уметь загружать, очищать и объединять таблицы в pandas; Понятие 1 темы «Фильтрация, группировка и сводные таблицы» — Ключевое понятие, которое объясняется на лекции простыми словами.; Понятие 2 темы «Фильтрация, группировка и сводные таблицы» — Ключевое понятие, которое объясняется на лекции простыми словами.; Понятие 3 темы «Фильтрация, группировка и сводные таблицы» — Ключевое понятие, которое объясняется на лекции простыми словами.</a:t>
+              <a:t>Подведите итоги: что теперь получается и какие вопросы остались; ответьте на вопросы.</a:t>
             </a:r>
           </a:p>
         </p:txBody>
@@ -946,7 +946,7 @@
           <a:lstStyle/>
           <a:p>
             <a:r>
-              <a:t>Уметь загружать, очищать и объединять таблицы в pandas; Владеть приёмами подготовки банковских данных к анализу; Понятие 1 темы «Очистка и объединение данных клиентов» — Ключевое понятие, которое объясняется на лекции простыми словами.; Понятие 2 темы «Очистка и объединение данных клиентов» — Ключевое понятие, которое объясняется на лекции простыми словами.; Понятие 3 темы «Очистка и объединение данных клиентов» — Ключевое понятие, которое объясняется на лекции простыми словами.</a:t>
+              <a:t>Подведите итоги: что теперь получается и какие вопросы остались; ответьте на вопросы.</a:t>
             </a:r>
           </a:p>
         </p:txBody>
@@ -1226,7 +1226,7 @@
           <a:lstStyle/>
           <a:p>
             <a:r>
-              <a:t>Знать основные типы данных Python и структуры таблиц pandas; Уметь загружать, очищать и объединять таблицы в pandas; Понятие 1 темы «Таблицы pandas: загрузка и просмотр данных» — Ключевое понятие, которое объясняется на лекции простыми словами.; Понятие 2 темы «Таблицы pandas: загрузка и просмотр данных» — Ключевое понятие, которое объясняется на лекции простыми словами.; Понятие 3 темы «Таблицы pandas: загрузка и просмотр данных» — Ключевое понятие, которое объясняется на лекции простыми словами.</a:t>
+              <a:t>Подведите итоги: что теперь получается и какие вопросы остались; ответьте на вопросы.</a:t>
             </a:r>
           </a:p>
         </p:txBody>
@@ -4529,7 +4529,7 @@
         </p:nvSpPr>
         <p:spPr>
           <a:xfrm>
-            <a:off x="731520" y="1828800"/>
+            <a:off x="731520" y="1097280"/>
             <a:ext cx="10698480" cy="1645920"/>
           </a:xfrm>
         </p:spPr>
@@ -4562,8 +4562,8 @@
         </p:nvSpPr>
         <p:spPr>
           <a:xfrm>
-            <a:off x="731520" y="3657600"/>
-            <a:ext cx="10698480" cy="1463040"/>
+            <a:off x="731520" y="2926080"/>
+            <a:ext cx="10698480" cy="3200400"/>
           </a:xfrm>
         </p:spPr>
         <p:txBody>
@@ -4603,6 +4603,54 @@
                 <a:latin typeface="Arial"/>
               </a:rPr>
               <a:t>Цель: Разобраться в теме «Таблицы pandas: загрузка и просмотр данных» и подготовиться к практике.</a:t>
+            </a:r>
+          </a:p>
+          <a:p>
+            <a:pPr algn="l"/>
+            <a:r>
+              <a:rPr sz="1600" b="0">
+                <a:solidFill>
+                  <a:srgbClr val="222222"/>
+                </a:solidFill>
+                <a:latin typeface="Arial"/>
+              </a:rPr>
+              <a:t>План лекции:</a:t>
+            </a:r>
+          </a:p>
+          <a:p>
+            <a:pPr algn="l"/>
+            <a:r>
+              <a:rPr sz="1500" b="0">
+                <a:solidFill>
+                  <a:srgbClr val="222222"/>
+                </a:solidFill>
+                <a:latin typeface="Arial"/>
+              </a:rPr>
+              <a:t>1. Введение в тему (Таблицы pandas: загрузка и просмотр данных)</a:t>
+            </a:r>
+          </a:p>
+          <a:p>
+            <a:pPr algn="l"/>
+            <a:r>
+              <a:rPr sz="1500" b="0">
+                <a:solidFill>
+                  <a:srgbClr val="222222"/>
+                </a:solidFill>
+                <a:latin typeface="Arial"/>
+              </a:rPr>
+              <a:t>2. Основные приёмы (Таблицы pandas: загрузка и просмотр данных)</a:t>
+            </a:r>
+          </a:p>
+          <a:p>
+            <a:pPr algn="l"/>
+            <a:r>
+              <a:rPr sz="1500" b="0">
+                <a:solidFill>
+                  <a:srgbClr val="222222"/>
+                </a:solidFill>
+                <a:latin typeface="Arial"/>
+              </a:rPr>
+              <a:t>3. Применение на практике (Таблицы pandas: загрузка и просмотр данных)</a:t>
             </a:r>
           </a:p>
         </p:txBody>
@@ -5055,7 +5103,7 @@
         </p:nvSpPr>
         <p:spPr>
           <a:xfrm>
-            <a:off x="731520" y="1828800"/>
+            <a:off x="731520" y="1097280"/>
             <a:ext cx="10698480" cy="1645920"/>
           </a:xfrm>
         </p:spPr>
@@ -5088,8 +5136,8 @@
         </p:nvSpPr>
         <p:spPr>
           <a:xfrm>
-            <a:off x="731520" y="3657600"/>
-            <a:ext cx="10698480" cy="1463040"/>
+            <a:off x="731520" y="2926080"/>
+            <a:ext cx="10698480" cy="3200400"/>
           </a:xfrm>
         </p:spPr>
         <p:txBody>
@@ -5129,6 +5177,54 @@
                 <a:latin typeface="Arial"/>
               </a:rPr>
               <a:t>Цель: Разобраться в теме «Очистка и объединение данных клиентов» и подготовиться к практике.</a:t>
+            </a:r>
+          </a:p>
+          <a:p>
+            <a:pPr algn="l"/>
+            <a:r>
+              <a:rPr sz="1600" b="0">
+                <a:solidFill>
+                  <a:srgbClr val="222222"/>
+                </a:solidFill>
+                <a:latin typeface="Arial"/>
+              </a:rPr>
+              <a:t>План лекции:</a:t>
+            </a:r>
+          </a:p>
+          <a:p>
+            <a:pPr algn="l"/>
+            <a:r>
+              <a:rPr sz="1500" b="0">
+                <a:solidFill>
+                  <a:srgbClr val="222222"/>
+                </a:solidFill>
+                <a:latin typeface="Arial"/>
+              </a:rPr>
+              <a:t>1. Введение в тему (Очистка и объединение данных клиентов)</a:t>
+            </a:r>
+          </a:p>
+          <a:p>
+            <a:pPr algn="l"/>
+            <a:r>
+              <a:rPr sz="1500" b="0">
+                <a:solidFill>
+                  <a:srgbClr val="222222"/>
+                </a:solidFill>
+                <a:latin typeface="Arial"/>
+              </a:rPr>
+              <a:t>2. Основные приёмы (Очистка и объединение данных клиентов)</a:t>
+            </a:r>
+          </a:p>
+          <a:p>
+            <a:pPr algn="l"/>
+            <a:r>
+              <a:rPr sz="1500" b="0">
+                <a:solidFill>
+                  <a:srgbClr val="222222"/>
+                </a:solidFill>
+                <a:latin typeface="Arial"/>
+              </a:rPr>
+              <a:t>3. Применение на практике (Очистка и объединение данных клиентов)</a:t>
             </a:r>
           </a:p>
         </p:txBody>
@@ -7637,7 +7733,7 @@
         </p:nvSpPr>
         <p:spPr>
           <a:xfrm>
-            <a:off x="731520" y="1828800"/>
+            <a:off x="731520" y="1097280"/>
             <a:ext cx="10698480" cy="1645920"/>
           </a:xfrm>
         </p:spPr>
@@ -7670,8 +7766,8 @@
         </p:nvSpPr>
         <p:spPr>
           <a:xfrm>
-            <a:off x="731520" y="3657600"/>
-            <a:ext cx="10698480" cy="1463040"/>
+            <a:off x="731520" y="2926080"/>
+            <a:ext cx="10698480" cy="3200400"/>
           </a:xfrm>
         </p:spPr>
         <p:txBody>
@@ -7711,6 +7807,54 @@
                 <a:latin typeface="Arial"/>
               </a:rPr>
               <a:t>Цель: Разобраться в теме «Фильтрация, группировка и сводные таблицы» и подготовиться к практике.</a:t>
+            </a:r>
+          </a:p>
+          <a:p>
+            <a:pPr algn="l"/>
+            <a:r>
+              <a:rPr sz="1600" b="0">
+                <a:solidFill>
+                  <a:srgbClr val="222222"/>
+                </a:solidFill>
+                <a:latin typeface="Arial"/>
+              </a:rPr>
+              <a:t>План лекции:</a:t>
+            </a:r>
+          </a:p>
+          <a:p>
+            <a:pPr algn="l"/>
+            <a:r>
+              <a:rPr sz="1500" b="0">
+                <a:solidFill>
+                  <a:srgbClr val="222222"/>
+                </a:solidFill>
+                <a:latin typeface="Arial"/>
+              </a:rPr>
+              <a:t>1. Введение в тему (Фильтрация, группировка и сводные таблицы)</a:t>
+            </a:r>
+          </a:p>
+          <a:p>
+            <a:pPr algn="l"/>
+            <a:r>
+              <a:rPr sz="1500" b="0">
+                <a:solidFill>
+                  <a:srgbClr val="222222"/>
+                </a:solidFill>
+                <a:latin typeface="Arial"/>
+              </a:rPr>
+              <a:t>2. Основные приёмы (Фильтрация, группировка и сводные таблицы)</a:t>
+            </a:r>
+          </a:p>
+          <a:p>
+            <a:pPr algn="l"/>
+            <a:r>
+              <a:rPr sz="1500" b="0">
+                <a:solidFill>
+                  <a:srgbClr val="222222"/>
+                </a:solidFill>
+                <a:latin typeface="Arial"/>
+              </a:rPr>
+              <a:t>3. Применение на практике (Фильтрация, группировка и сводные таблицы)</a:t>
             </a:r>
           </a:p>
         </p:txBody>
